--- a/Football Data WareHouse.pptx
+++ b/Football Data WareHouse.pptx
@@ -19730,13 +19730,13 @@
   <p:clrMapOvr>
     <a:masterClrMapping/>
   </p:clrMapOvr>
-  <mc:AlternateContent xmlns:mc="http://schemas.openxmlformats.org/markup-compatibility/2006">
-    <mc:Choice xmlns:p14="http://schemas.microsoft.com/office/powerpoint/2010/main" Requires="p14">
+  <mc:AlternateContent xmlns:mc="http://schemas.openxmlformats.org/markup-compatibility/2006" xmlns:p14="http://schemas.microsoft.com/office/powerpoint/2010/main">
+    <mc:Choice Requires="p14">
       <p:transition spd="med" p14:dur="700">
         <p:fade/>
       </p:transition>
     </mc:Choice>
-    <mc:Fallback>
+    <mc:Fallback xmlns="">
       <p:transition spd="med">
         <p:fade/>
       </p:transition>
@@ -20426,7 +20426,7 @@
               <a:t> (e.g., </a:t>
             </a:r>
             <a:r>
-              <a:rPr lang="it-IT" sz="2500" dirty="0" err="1"/>
+              <a:rPr lang="it-IT" sz="2200" dirty="0" err="1"/>
               <a:t>missing</a:t>
             </a:r>
             <a:r>
